--- a/media/resources/files/EkiOrunduuOnduktar_KoshuuKemituu1234.pptx
+++ b/media/resources/files/EkiOrunduuOnduktar_KoshuuKemituu1234.pptx
@@ -4854,7 +4854,7 @@
                 <a:ea typeface="+mn-ea"/>
                 <a:cs typeface="+mn-cs"/>
               </a:rPr>
-              <a:t>Турдуу пикирлер учун ыраазычылык билдиребиз.</a:t>
+              <a:t>Түрдүү пикирлер үчүн ыраазычылык билдиребиз.</a:t>
             </a:r>
           </a:p>
           <a:p>

--- a/media/resources/files/EkiOrunduuOnduktar_KoshuuKemituu1234.pptx
+++ b/media/resources/files/EkiOrunduuOnduktar_KoshuuKemituu1234.pptx
@@ -2417,7 +2417,7 @@
             <a:pPr algn="r"/>
             <a:r>
               <a:rPr lang="en-GB" sz="2000" dirty="0"/>
-              <a:t>0.16 + 0.23 = </a:t>
+              <a:t>0,16 + 0,23 = </a:t>
             </a:r>
           </a:p>
         </p:txBody>
@@ -2648,7 +2648,7 @@
             <a:pPr algn="r"/>
             <a:r>
               <a:rPr lang="en-GB" sz="2000" dirty="0"/>
-              <a:t>0.86 − 0.24 = </a:t>
+              <a:t>0,86 − 0,24 = </a:t>
             </a:r>
           </a:p>
         </p:txBody>
@@ -2684,7 +2684,7 @@
             <a:pPr algn="r"/>
             <a:r>
               <a:rPr lang="en-GB" sz="2000" dirty="0"/>
-              <a:t>0.28 + 0.34 = </a:t>
+              <a:t>0,28 + 0,34 = </a:t>
             </a:r>
           </a:p>
         </p:txBody>
@@ -2759,7 +2759,7 @@
             <a:pPr algn="r"/>
             <a:r>
               <a:rPr lang="en-GB" sz="2000" dirty="0"/>
-              <a:t>0.43 − 0.07 = </a:t>
+              <a:t>0,43 − 0,07 = </a:t>
             </a:r>
           </a:p>
         </p:txBody>
@@ -2795,7 +2795,7 @@
             <a:pPr algn="r"/>
             <a:r>
               <a:rPr lang="en-GB" sz="2000" dirty="0"/>
-              <a:t>2.37 + 1.18 + 0.2 = </a:t>
+              <a:t>2,37 + 1,18 + 0,2 = </a:t>
             </a:r>
           </a:p>
         </p:txBody>
@@ -2870,7 +2870,7 @@
             <a:pPr algn="r"/>
             <a:r>
               <a:rPr lang="en-GB" sz="2000" dirty="0"/>
-              <a:t>6.45 − 3.58 = </a:t>
+              <a:t>6,45 − 3,58 = </a:t>
             </a:r>
           </a:p>
         </p:txBody>
@@ -2906,7 +2906,7 @@
             <a:pPr algn="r"/>
             <a:r>
               <a:rPr lang="en-GB" sz="2000" dirty="0"/>
-              <a:t>8.52 + 3.791 = </a:t>
+              <a:t>8,52 + 3,791 = </a:t>
             </a:r>
           </a:p>
         </p:txBody>
@@ -2984,7 +2984,7 @@
             <a:pPr algn="r"/>
             <a:r>
               <a:rPr lang="en-GB" sz="2000" dirty="0"/>
-              <a:t>7.63 − 1.85 + 1.5 – 0.003 = </a:t>
+              <a:t>7,63 − 1,85 + 1,5 – 0,003 = </a:t>
             </a:r>
           </a:p>
         </p:txBody>
@@ -3144,7 +3144,7 @@
             <a:pPr algn="r"/>
             <a:r>
               <a:rPr lang="en-GB" sz="2000" dirty="0"/>
-              <a:t>0.16 + 0.23 = </a:t>
+              <a:t>0,16 + 0,23 = </a:t>
             </a:r>
           </a:p>
         </p:txBody>
@@ -3384,7 +3384,7 @@
             <a:pPr algn="just"/>
             <a:r>
               <a:rPr lang="en-GB" sz="2000" dirty="0"/>
-              <a:t>0.39</a:t>
+              <a:t>0,39</a:t>
             </a:r>
           </a:p>
         </p:txBody>
@@ -3420,7 +3420,7 @@
             <a:pPr algn="r"/>
             <a:r>
               <a:rPr lang="en-GB" sz="2000" dirty="0"/>
-              <a:t>0.86 − 0.24 = </a:t>
+              <a:t>0,86 − 0,24 = </a:t>
             </a:r>
           </a:p>
         </p:txBody>
@@ -3465,7 +3465,7 @@
             <a:pPr algn="just"/>
             <a:r>
               <a:rPr lang="en-GB" sz="2000" dirty="0"/>
-              <a:t>0.62</a:t>
+              <a:t>0,62</a:t>
             </a:r>
           </a:p>
         </p:txBody>
@@ -3501,7 +3501,7 @@
             <a:pPr algn="r"/>
             <a:r>
               <a:rPr lang="en-GB" sz="2000" dirty="0"/>
-              <a:t>0.28 + 0.34 = </a:t>
+              <a:t>0,28 + 0,34 = </a:t>
             </a:r>
           </a:p>
         </p:txBody>
@@ -3585,7 +3585,7 @@
             <a:pPr algn="just"/>
             <a:r>
               <a:rPr lang="en-GB" sz="2000" dirty="0"/>
-              <a:t>0.62</a:t>
+              <a:t>0,62</a:t>
             </a:r>
           </a:p>
         </p:txBody>
@@ -3621,7 +3621,7 @@
             <a:pPr algn="r"/>
             <a:r>
               <a:rPr lang="en-GB" sz="2000" dirty="0"/>
-              <a:t>0.43 − 0.07 = </a:t>
+              <a:t>0,43 − 0,07 = </a:t>
             </a:r>
           </a:p>
         </p:txBody>
@@ -3666,7 +3666,7 @@
             <a:pPr algn="just"/>
             <a:r>
               <a:rPr lang="en-GB" sz="2000" dirty="0"/>
-              <a:t>0.36</a:t>
+              <a:t>0,36</a:t>
             </a:r>
           </a:p>
         </p:txBody>
@@ -3702,7 +3702,7 @@
             <a:pPr algn="r"/>
             <a:r>
               <a:rPr lang="en-GB" sz="2000" dirty="0"/>
-              <a:t>2.37 + 1.18 + 0.2 = </a:t>
+              <a:t>2,37 + 1,18 + 0,2 = </a:t>
             </a:r>
           </a:p>
         </p:txBody>
@@ -3786,7 +3786,7 @@
             <a:pPr algn="just"/>
             <a:r>
               <a:rPr lang="en-GB" sz="2000" dirty="0"/>
-              <a:t>3.75</a:t>
+              <a:t>3,75</a:t>
             </a:r>
           </a:p>
         </p:txBody>
@@ -3822,7 +3822,7 @@
             <a:pPr algn="r"/>
             <a:r>
               <a:rPr lang="en-GB" sz="2000" dirty="0"/>
-              <a:t>6.45 − 3.58 = </a:t>
+              <a:t>6,45 − 3,58 = </a:t>
             </a:r>
           </a:p>
         </p:txBody>
@@ -3867,7 +3867,7 @@
             <a:pPr algn="just"/>
             <a:r>
               <a:rPr lang="en-GB" sz="2000" dirty="0"/>
-              <a:t>2.87</a:t>
+              <a:t>2,87</a:t>
             </a:r>
           </a:p>
         </p:txBody>
@@ -3903,7 +3903,7 @@
             <a:pPr algn="r"/>
             <a:r>
               <a:rPr lang="en-GB" sz="2000" dirty="0"/>
-              <a:t>8.52 + 3.791 = </a:t>
+              <a:t>8,52 + 3,791 = </a:t>
             </a:r>
           </a:p>
         </p:txBody>
@@ -3987,7 +3987,7 @@
             <a:pPr algn="just"/>
             <a:r>
               <a:rPr lang="en-GB" sz="2000" dirty="0"/>
-              <a:t>12.311</a:t>
+              <a:t>12,311</a:t>
             </a:r>
           </a:p>
         </p:txBody>
@@ -4023,7 +4023,7 @@
             <a:pPr algn="r"/>
             <a:r>
               <a:rPr lang="en-GB" sz="2000" dirty="0"/>
-              <a:t>7.63 − 1.85 + 1.5 – 0.003 = </a:t>
+              <a:t>7,63 − 1,85 + 1,5 – 0,003 = </a:t>
             </a:r>
           </a:p>
         </p:txBody>
@@ -4068,7 +4068,7 @@
             <a:pPr algn="just"/>
             <a:r>
               <a:rPr lang="en-GB" sz="2000" dirty="0"/>
-              <a:t>7.277</a:t>
+              <a:t>7,277</a:t>
             </a:r>
           </a:p>
         </p:txBody>
